--- a/docs/Kuja_Grant_Pitch_Deck_V4_July2026.pptx
+++ b/docs/Kuja_Grant_Pitch_Deck_V4_July2026.pptx
@@ -26079,7 +26079,7 @@
                 <a:ea typeface="Calibri" pitchFamily="34" charset="-122"/>
                 <a:cs typeface="Calibri" pitchFamily="34" charset="-120"/>
               </a:rPr>
-              <a:t>Marketplace discovers. Elevate operates. ERP keeps the books. Grant is where money actually moves.</a:t>
+              <a:t>Marketplace discovers. ERP keeps the books. Grant is where money actually moves.</a:t>
             </a:r>
             <a:endParaRPr lang="en-US" sz="1800" dirty="0"/>
           </a:p>
@@ -26420,11 +26420,11 @@
             <a:avLst/>
           </a:prstGeom>
           <a:solidFill>
-            <a:srgbClr val="F97316"/>
+            <a:srgbClr val="7C2D12"/>
           </a:solidFill>
           <a:ln w="12700">
             <a:solidFill>
-              <a:srgbClr val="F97316"/>
+              <a:srgbClr val="7C2D12"/>
             </a:solidFill>
             <a:prstDash val="solid"/>
           </a:ln>
@@ -26457,13 +26457,13 @@
             <a:r>
               <a:rPr lang="en-US" sz="1300" b="1" spc="200" kern="0" dirty="0">
                 <a:solidFill>
-                  <a:srgbClr val="F97316"/>
-                </a:solidFill>
-                <a:latin typeface="Calibri" pitchFamily="34" charset="0"/>
-                <a:ea typeface="Calibri" pitchFamily="34" charset="-122"/>
-                <a:cs typeface="Calibri" pitchFamily="34" charset="-120"/>
-              </a:rPr>
-              <a:t>ELEVATE</a:t>
+                  <a:srgbClr val="7C2D12"/>
+                </a:solidFill>
+                <a:latin typeface="Calibri" pitchFamily="34" charset="0"/>
+                <a:ea typeface="Calibri" pitchFamily="34" charset="-122"/>
+                <a:cs typeface="Calibri" pitchFamily="34" charset="-120"/>
+              </a:rPr>
+              <a:t>TRUST PROFILE</a:t>
             </a:r>
             <a:endParaRPr lang="en-US" sz="1300" dirty="0"/>
           </a:p>
@@ -26502,7 +26502,7 @@
                 <a:ea typeface="Calibri" pitchFamily="34" charset="-122"/>
                 <a:cs typeface="Calibri" pitchFamily="34" charset="-120"/>
               </a:rPr>
-              <a:t>operates the NGO</a:t>
+              <a:t>portable identity</a:t>
             </a:r>
             <a:endParaRPr lang="en-US" sz="1100" dirty="0"/>
           </a:p>
@@ -26676,11 +26676,11 @@
             <a:avLst/>
           </a:prstGeom>
           <a:solidFill>
-            <a:srgbClr val="7C2D12"/>
+            <a:srgbClr val="F97316"/>
           </a:solidFill>
           <a:ln w="12700">
             <a:solidFill>
-              <a:srgbClr val="7C2D12"/>
+              <a:srgbClr val="F97316"/>
             </a:solidFill>
             <a:prstDash val="solid"/>
           </a:ln>
@@ -26713,13 +26713,13 @@
             <a:r>
               <a:rPr lang="en-US" sz="1300" b="1" spc="200" kern="0" dirty="0">
                 <a:solidFill>
-                  <a:srgbClr val="7C2D12"/>
-                </a:solidFill>
-                <a:latin typeface="Calibri" pitchFamily="34" charset="0"/>
-                <a:ea typeface="Calibri" pitchFamily="34" charset="-122"/>
-                <a:cs typeface="Calibri" pitchFamily="34" charset="-120"/>
-              </a:rPr>
-              <a:t>TRUST PROFILE</a:t>
+                  <a:srgbClr val="F97316"/>
+                </a:solidFill>
+                <a:latin typeface="Calibri" pitchFamily="34" charset="0"/>
+                <a:ea typeface="Calibri" pitchFamily="34" charset="-122"/>
+                <a:cs typeface="Calibri" pitchFamily="34" charset="-120"/>
+              </a:rPr>
+              <a:t>AUDIT CHAIN</a:t>
             </a:r>
             <a:endParaRPr lang="en-US" sz="1300" dirty="0"/>
           </a:p>
@@ -26758,7 +26758,7 @@
                 <a:ea typeface="Calibri" pitchFamily="34" charset="-122"/>
                 <a:cs typeface="Calibri" pitchFamily="34" charset="-120"/>
               </a:rPr>
-              <a:t>portable identity</a:t>
+              <a:t>hash-anchored evidence</a:t>
             </a:r>
             <a:endParaRPr lang="en-US" sz="1100" dirty="0"/>
           </a:p>
